--- a/prompt_engineering/examples/Examples_contentCreation_coding_summarization_QA_dataExtraction.pptx
+++ b/prompt_engineering/examples/Examples_contentCreation_coding_summarization_QA_dataExtraction.pptx
@@ -247,7 +247,7 @@
           <a:p>
             <a:fld id="{7BAEECA8-D063-486F-AE31-5020270C1449}" type="datetimeFigureOut">
               <a:rPr lang="en-US" smtClean="0"/>
-              <a:t>7/6/2026</a:t>
+              <a:t>9/21/2026</a:t>
             </a:fld>
             <a:endParaRPr lang="en-US"/>
           </a:p>
@@ -489,7 +489,7 @@
           <a:p>
             <a:fld id="{6383FAE1-13DE-4511-8C1B-C8AFB720664C}" type="datetimeFigureOut">
               <a:rPr lang="en-US" smtClean="0"/>
-              <a:t>7/6/2026</a:t>
+              <a:t>9/21/2026</a:t>
             </a:fld>
             <a:endParaRPr lang="en-US"/>
           </a:p>
@@ -687,7 +687,7 @@
           <a:p>
             <a:fld id="{6383FAE1-13DE-4511-8C1B-C8AFB720664C}" type="datetimeFigureOut">
               <a:rPr lang="en-US" smtClean="0"/>
-              <a:t>7/6/2026</a:t>
+              <a:t>9/21/2026</a:t>
             </a:fld>
             <a:endParaRPr lang="en-US"/>
           </a:p>
@@ -895,7 +895,7 @@
           <a:p>
             <a:fld id="{6383FAE1-13DE-4511-8C1B-C8AFB720664C}" type="datetimeFigureOut">
               <a:rPr lang="en-US" smtClean="0"/>
-              <a:t>7/6/2026</a:t>
+              <a:t>9/21/2026</a:t>
             </a:fld>
             <a:endParaRPr lang="en-US"/>
           </a:p>
@@ -1093,7 +1093,7 @@
           <a:p>
             <a:fld id="{6383FAE1-13DE-4511-8C1B-C8AFB720664C}" type="datetimeFigureOut">
               <a:rPr lang="en-US" smtClean="0"/>
-              <a:t>7/6/2026</a:t>
+              <a:t>9/21/2026</a:t>
             </a:fld>
             <a:endParaRPr lang="en-US"/>
           </a:p>
@@ -1368,7 +1368,7 @@
           <a:p>
             <a:fld id="{6383FAE1-13DE-4511-8C1B-C8AFB720664C}" type="datetimeFigureOut">
               <a:rPr lang="en-US" smtClean="0"/>
-              <a:t>7/6/2026</a:t>
+              <a:t>9/21/2026</a:t>
             </a:fld>
             <a:endParaRPr lang="en-US"/>
           </a:p>
@@ -1633,7 +1633,7 @@
           <a:p>
             <a:fld id="{6383FAE1-13DE-4511-8C1B-C8AFB720664C}" type="datetimeFigureOut">
               <a:rPr lang="en-US" smtClean="0"/>
-              <a:t>7/6/2026</a:t>
+              <a:t>9/21/2026</a:t>
             </a:fld>
             <a:endParaRPr lang="en-US"/>
           </a:p>
@@ -2045,7 +2045,7 @@
           <a:p>
             <a:fld id="{6383FAE1-13DE-4511-8C1B-C8AFB720664C}" type="datetimeFigureOut">
               <a:rPr lang="en-US" smtClean="0"/>
-              <a:t>7/6/2026</a:t>
+              <a:t>9/21/2026</a:t>
             </a:fld>
             <a:endParaRPr lang="en-US"/>
           </a:p>
@@ -2186,7 +2186,7 @@
           <a:p>
             <a:fld id="{6383FAE1-13DE-4511-8C1B-C8AFB720664C}" type="datetimeFigureOut">
               <a:rPr lang="en-US" smtClean="0"/>
-              <a:t>7/6/2026</a:t>
+              <a:t>9/21/2026</a:t>
             </a:fld>
             <a:endParaRPr lang="en-US"/>
           </a:p>
@@ -2299,7 +2299,7 @@
           <a:p>
             <a:fld id="{6383FAE1-13DE-4511-8C1B-C8AFB720664C}" type="datetimeFigureOut">
               <a:rPr lang="en-US" smtClean="0"/>
-              <a:t>7/6/2026</a:t>
+              <a:t>9/21/2026</a:t>
             </a:fld>
             <a:endParaRPr lang="en-US"/>
           </a:p>
@@ -2610,7 +2610,7 @@
           <a:p>
             <a:fld id="{6383FAE1-13DE-4511-8C1B-C8AFB720664C}" type="datetimeFigureOut">
               <a:rPr lang="en-US" smtClean="0"/>
-              <a:t>7/6/2026</a:t>
+              <a:t>9/21/2026</a:t>
             </a:fld>
             <a:endParaRPr lang="en-US"/>
           </a:p>
@@ -2901,7 +2901,7 @@
           <a:p>
             <a:fld id="{6383FAE1-13DE-4511-8C1B-C8AFB720664C}" type="datetimeFigureOut">
               <a:rPr lang="en-US" smtClean="0"/>
-              <a:t>7/6/2026</a:t>
+              <a:t>9/21/2026</a:t>
             </a:fld>
             <a:endParaRPr lang="en-US"/>
           </a:p>
@@ -3145,7 +3145,7 @@
           <a:p>
             <a:fld id="{6383FAE1-13DE-4511-8C1B-C8AFB720664C}" type="datetimeFigureOut">
               <a:rPr lang="en-US" smtClean="0"/>
-              <a:t>7/6/2026</a:t>
+              <a:t>9/21/2026</a:t>
             </a:fld>
             <a:endParaRPr lang="en-US"/>
           </a:p>
@@ -3782,33 +3782,7 @@
                 <a:effectLst/>
                 <a:latin typeface="Anthropic Sans"/>
               </a:rPr>
-              <a:t>Video </a:t>
-            </a:r>
-            <a:r>
-              <a:rPr lang="en-US" sz="2000" b="1" i="0" u="sng" dirty="0" err="1">
-                <a:solidFill>
-                  <a:schemeClr val="accent6">
-                    <a:lumMod val="60000"/>
-                    <a:lumOff val="40000"/>
-                  </a:schemeClr>
-                </a:solidFill>
-                <a:effectLst/>
-                <a:latin typeface="Anthropic Sans"/>
-              </a:rPr>
-              <a:t>script:Use</a:t>
-            </a:r>
-            <a:r>
-              <a:rPr lang="en-US" sz="2000" b="1" i="0" u="sng" dirty="0">
-                <a:solidFill>
-                  <a:schemeClr val="accent6">
-                    <a:lumMod val="60000"/>
-                    <a:lumOff val="40000"/>
-                  </a:schemeClr>
-                </a:solidFill>
-                <a:effectLst/>
-                <a:latin typeface="Anthropic Sans"/>
-              </a:rPr>
-              <a:t> case in YouTube, product demos &amp; explainer videos</a:t>
+              <a:t>Video script: Use case in YouTube, product demos &amp; explainer videos</a:t>
             </a:r>
           </a:p>
           <a:p>
